--- a/template /master-template.v31-edited.pptx
+++ b/template /master-template.v31-edited.pptx
@@ -15387,7 +15387,7 @@
         <p:spPr>
           <a:xfrm>
             <a:off x="3925119" y="1476970"/>
-            <a:ext cx="2303934" cy="3083496"/>
+            <a:ext cx="2303934" cy="3503030"/>
           </a:xfrm>
           <a:prstGeom prst="roundRect">
             <a:avLst>
@@ -15465,7 +15465,7 @@
         <p:spPr>
           <a:xfrm>
             <a:off x="4066952" y="2285479"/>
-            <a:ext cx="2020267" cy="2133154"/>
+            <a:ext cx="2020267" cy="2664521"/>
           </a:xfrm>
           <a:prstGeom prst="rect">
             <a:avLst/>
@@ -15555,7 +15555,7 @@
         <p:spPr>
           <a:xfrm>
             <a:off x="6343873" y="1476970"/>
-            <a:ext cx="2304008" cy="3083496"/>
+            <a:ext cx="2304008" cy="3503030"/>
           </a:xfrm>
           <a:prstGeom prst="roundRect">
             <a:avLst>
@@ -15633,7 +15633,7 @@
         <p:spPr>
           <a:xfrm>
             <a:off x="6485706" y="2285479"/>
-            <a:ext cx="2020342" cy="2133154"/>
+            <a:ext cx="2020342" cy="2664521"/>
           </a:xfrm>
           <a:prstGeom prst="rect">
             <a:avLst/>
@@ -15945,6 +15945,24 @@
               <a:buFont typeface="+mj-lt"/>
               <a:buAutoNum type="arabicPeriod" startAt="2"/>
             </a:pPr>
+            <a:endParaRPr lang="en-US" sz="750" b="1" dirty="0">
+              <a:solidFill>
+                <a:srgbClr val="000000"/>
+              </a:solidFill>
+              <a:latin typeface="HP Forma DJR Office" pitchFamily="34" charset="0"/>
+              <a:ea typeface="HP Forma DJR Office" pitchFamily="34" charset="-122"/>
+              <a:cs typeface="HP Forma DJR Office" pitchFamily="34" charset="-120"/>
+            </a:endParaRPr>
+          </a:p>
+          <a:p>
+            <a:pPr marL="342900" indent="-342900" algn="l">
+              <a:lnSpc>
+                <a:spcPct val="113000"/>
+              </a:lnSpc>
+              <a:buSzPct val="100000"/>
+              <a:buFont typeface="+mj-lt"/>
+              <a:buAutoNum type="arabicPeriod" startAt="2"/>
+            </a:pPr>
             <a:r>
               <a:rPr lang="en-US" sz="750" b="1" dirty="0">
                 <a:solidFill>
@@ -15988,6 +16006,24 @@
               <a:buFont typeface="+mj-lt"/>
               <a:buAutoNum type="arabicPeriod" startAt="3"/>
             </a:pPr>
+            <a:endParaRPr lang="en-US" sz="750" b="1" dirty="0">
+              <a:solidFill>
+                <a:srgbClr val="000000"/>
+              </a:solidFill>
+              <a:latin typeface="HP Forma DJR Office" pitchFamily="34" charset="0"/>
+              <a:ea typeface="HP Forma DJR Office" pitchFamily="34" charset="-122"/>
+              <a:cs typeface="HP Forma DJR Office" pitchFamily="34" charset="-120"/>
+            </a:endParaRPr>
+          </a:p>
+          <a:p>
+            <a:pPr marL="342900" indent="-342900" algn="l">
+              <a:lnSpc>
+                <a:spcPct val="113000"/>
+              </a:lnSpc>
+              <a:buSzPct val="100000"/>
+              <a:buFont typeface="+mj-lt"/>
+              <a:buAutoNum type="arabicPeriod" startAt="3"/>
+            </a:pPr>
             <a:r>
               <a:rPr lang="en-US" sz="750" b="1" dirty="0">
                 <a:solidFill>
@@ -16140,6 +16176,24 @@
               <a:buFont typeface="+mj-lt"/>
               <a:buAutoNum type="arabicPeriod" startAt="2"/>
             </a:pPr>
+            <a:endParaRPr lang="en-US" sz="750" b="1" dirty="0">
+              <a:solidFill>
+                <a:srgbClr val="000000"/>
+              </a:solidFill>
+              <a:latin typeface="HP Forma DJR Office" pitchFamily="34" charset="0"/>
+              <a:ea typeface="HP Forma DJR Office" pitchFamily="34" charset="-122"/>
+              <a:cs typeface="HP Forma DJR Office" pitchFamily="34" charset="-120"/>
+            </a:endParaRPr>
+          </a:p>
+          <a:p>
+            <a:pPr marL="342900" indent="-342900" algn="l">
+              <a:lnSpc>
+                <a:spcPct val="113000"/>
+              </a:lnSpc>
+              <a:buSzPct val="100000"/>
+              <a:buFont typeface="+mj-lt"/>
+              <a:buAutoNum type="arabicPeriod" startAt="2"/>
+            </a:pPr>
             <a:r>
               <a:rPr lang="en-US" sz="750" b="1" dirty="0">
                 <a:solidFill>
@@ -16173,6 +16227,24 @@
               <a:t>[Discuss how the HP workplace modernization solutions can help Aviva Canada manage its diverse insurance products more effectively. Focus on understanding their current processes and identifying areas for improvement.]</a:t>
             </a:r>
             <a:endParaRPr lang="en-US" sz="750" dirty="0"/>
+          </a:p>
+          <a:p>
+            <a:pPr marL="342900" indent="-342900" algn="l">
+              <a:lnSpc>
+                <a:spcPct val="113000"/>
+              </a:lnSpc>
+              <a:buSzPct val="100000"/>
+              <a:buFont typeface="+mj-lt"/>
+              <a:buAutoNum type="arabicPeriod" startAt="3"/>
+            </a:pPr>
+            <a:endParaRPr lang="en-US" sz="750" b="1" dirty="0">
+              <a:solidFill>
+                <a:srgbClr val="000000"/>
+              </a:solidFill>
+              <a:latin typeface="HP Forma DJR Office" pitchFamily="34" charset="0"/>
+              <a:ea typeface="HP Forma DJR Office" pitchFamily="34" charset="-122"/>
+              <a:cs typeface="HP Forma DJR Office" pitchFamily="34" charset="-120"/>
+            </a:endParaRPr>
           </a:p>
           <a:p>
             <a:pPr marL="342900" indent="-342900" algn="l">
@@ -17547,11 +17619,12 @@
           </a:bodyPr>
           <a:lstStyle/>
           <a:p>
-            <a:pPr algn="l">
+            <a:pPr marL="342900" indent="-342900" algn="l">
               <a:lnSpc>
                 <a:spcPct val="120000"/>
               </a:lnSpc>
               <a:buSzPct val="100000"/>
+              <a:buAutoNum type="arabicPeriod"/>
             </a:pPr>
             <a:r>
               <a:rPr lang="en-US" sz="750" dirty="0">
@@ -17562,7 +17635,28 @@
                 <a:ea typeface="HP Forma DJR Office" pitchFamily="34" charset="-122"/>
                 <a:cs typeface="HP Forma DJR Office" pitchFamily="34" charset="-120"/>
               </a:rPr>
-              <a:t>[Engage Lisa by demonstrating how your solution bridges technology and underwriting outcomes. Lead with concrete examples of automation, data enrichment, or analytics capabilities that translate into measurable improvements in underwriting speed, accuracy, or loss ratio.]</a:t>
+              <a:t>[Engage Lisa by demonstrating how your solution bridges technology and underwriting outcomes.</a:t>
+            </a:r>
+            <a:endParaRPr lang="en-US" sz="750" dirty="0"/>
+          </a:p>
+          <a:p>
+            <a:pPr marL="342900" indent="-342900" algn="l">
+              <a:lnSpc>
+                <a:spcPct val="120000"/>
+              </a:lnSpc>
+              <a:buSzPct val="100000"/>
+              <a:buAutoNum type="arabicPeriod"/>
+            </a:pPr>
+            <a:r>
+              <a:rPr lang="en-US" sz="750" dirty="0">
+                <a:solidFill>
+                  <a:srgbClr val="000000"/>
+                </a:solidFill>
+                <a:latin typeface="HP Forma DJR Office" pitchFamily="34" charset="0"/>
+                <a:ea typeface="HP Forma DJR Office" pitchFamily="34" charset="-122"/>
+                <a:cs typeface="HP Forma DJR Office" pitchFamily="34" charset="-120"/>
+              </a:rPr>
+              <a:t>Lead with concrete examples of automation, data enrichment, or analytics capabilities that translate into measurable improvements in underwriting speed, accuracy, or loss ratio.]</a:t>
             </a:r>
             <a:endParaRPr lang="en-US" sz="750" dirty="0"/>
           </a:p>
@@ -18476,8 +18570,8 @@
         </p:nvSpPr>
         <p:spPr>
           <a:xfrm>
-            <a:off x="496119" y="1313557"/>
-            <a:ext cx="4035996" cy="920651"/>
+            <a:off x="496119" y="1243557"/>
+            <a:ext cx="4035996" cy="1069479"/>
           </a:xfrm>
           <a:prstGeom prst="roundRect">
             <a:avLst>
@@ -18513,7 +18607,7 @@
         </p:nvSpPr>
         <p:spPr>
           <a:xfrm>
-            <a:off x="602382" y="1419820"/>
+            <a:off x="602382" y="1349820"/>
             <a:ext cx="2010370" cy="166092"/>
           </a:xfrm>
           <a:prstGeom prst="rect">
@@ -18561,7 +18655,7 @@
         </p:nvSpPr>
         <p:spPr>
           <a:xfrm>
-            <a:off x="602382" y="1633686"/>
+            <a:off x="602382" y="1563686"/>
             <a:ext cx="3823469" cy="494258"/>
           </a:xfrm>
           <a:prstGeom prst="rect">
@@ -18684,8 +18778,8 @@
         </p:nvSpPr>
         <p:spPr>
           <a:xfrm>
-            <a:off x="4611812" y="1313557"/>
-            <a:ext cx="4036070" cy="920651"/>
+            <a:off x="4611812" y="1243557"/>
+            <a:ext cx="4036070" cy="1069479"/>
           </a:xfrm>
           <a:prstGeom prst="roundRect">
             <a:avLst>
@@ -18721,7 +18815,7 @@
         </p:nvSpPr>
         <p:spPr>
           <a:xfrm>
-            <a:off x="4718075" y="1419820"/>
+            <a:off x="4718075" y="1349820"/>
             <a:ext cx="1783705" cy="166092"/>
           </a:xfrm>
           <a:prstGeom prst="rect">
@@ -18769,7 +18863,7 @@
         </p:nvSpPr>
         <p:spPr>
           <a:xfrm>
-            <a:off x="4718075" y="1633686"/>
+            <a:off x="4718075" y="1563686"/>
             <a:ext cx="3823543" cy="494258"/>
           </a:xfrm>
           <a:prstGeom prst="rect">
@@ -18889,7 +18983,7 @@
         </p:nvSpPr>
         <p:spPr>
           <a:xfrm>
-            <a:off x="496119" y="2313905"/>
+            <a:off x="496119" y="2393905"/>
             <a:ext cx="4035996" cy="1069479"/>
           </a:xfrm>
           <a:prstGeom prst="roundRect">
@@ -18926,7 +19020,7 @@
         </p:nvSpPr>
         <p:spPr>
           <a:xfrm>
-            <a:off x="602382" y="2420169"/>
+            <a:off x="602382" y="2500169"/>
             <a:ext cx="2009180" cy="166092"/>
           </a:xfrm>
           <a:prstGeom prst="rect">
@@ -18974,7 +19068,7 @@
         </p:nvSpPr>
         <p:spPr>
           <a:xfrm>
-            <a:off x="602382" y="2634035"/>
+            <a:off x="602382" y="2714035"/>
             <a:ext cx="3823469" cy="494258"/>
           </a:xfrm>
           <a:prstGeom prst="rect">
@@ -19097,7 +19191,7 @@
         </p:nvSpPr>
         <p:spPr>
           <a:xfrm>
-            <a:off x="4611812" y="2313905"/>
+            <a:off x="4611812" y="2393905"/>
             <a:ext cx="4036070" cy="1069479"/>
           </a:xfrm>
           <a:prstGeom prst="roundRect">
@@ -19136,7 +19230,7 @@
         </p:nvSpPr>
         <p:spPr>
           <a:xfrm>
-            <a:off x="4718075" y="2420169"/>
+            <a:off x="4718075" y="2500169"/>
             <a:ext cx="1565002" cy="166092"/>
           </a:xfrm>
           <a:prstGeom prst="rect">
@@ -19184,7 +19278,7 @@
         </p:nvSpPr>
         <p:spPr>
           <a:xfrm>
-            <a:off x="4718075" y="2634035"/>
+            <a:off x="4718075" y="2714035"/>
             <a:ext cx="3823543" cy="643086"/>
           </a:xfrm>
           <a:prstGeom prst="rect">
